--- a/probability_and_statistics/5_inference/hypothesis-testing/Hypothesis-Testing3_t-test.pptx
+++ b/probability_and_statistics/5_inference/hypothesis-testing/Hypothesis-Testing3_t-test.pptx
@@ -236,7 +236,7 @@
           <a:p>
             <a:fld id="{7BAEECA8-D063-486F-AE31-5020270C1449}" type="datetimeFigureOut">
               <a:rPr lang="en-US" smtClean="0"/>
-              <a:t>4/14/2026</a:t>
+              <a:t>5/4/2026</a:t>
             </a:fld>
             <a:endParaRPr lang="en-US"/>
           </a:p>
@@ -2589,7 +2589,7 @@
           <a:p>
             <a:fld id="{CB233BD1-3BA8-448D-9D08-7846095EA517}" type="datetimeFigureOut">
               <a:rPr lang="en-US" smtClean="0"/>
-              <a:t>4/13/2026</a:t>
+              <a:t>5/4/2026</a:t>
             </a:fld>
             <a:endParaRPr lang="en-US"/>
           </a:p>
@@ -3003,7 +3003,7 @@
           <a:p>
             <a:fld id="{6383FAE1-13DE-4511-8C1B-C8AFB720664C}" type="datetimeFigureOut">
               <a:rPr lang="en-US" smtClean="0"/>
-              <a:t>4/13/2026</a:t>
+              <a:t>5/4/2026</a:t>
             </a:fld>
             <a:endParaRPr lang="en-US"/>
           </a:p>
@@ -3201,7 +3201,7 @@
           <a:p>
             <a:fld id="{6383FAE1-13DE-4511-8C1B-C8AFB720664C}" type="datetimeFigureOut">
               <a:rPr lang="en-US" smtClean="0"/>
-              <a:t>4/13/2026</a:t>
+              <a:t>5/4/2026</a:t>
             </a:fld>
             <a:endParaRPr lang="en-US"/>
           </a:p>
@@ -3409,7 +3409,7 @@
           <a:p>
             <a:fld id="{6383FAE1-13DE-4511-8C1B-C8AFB720664C}" type="datetimeFigureOut">
               <a:rPr lang="en-US" smtClean="0"/>
-              <a:t>4/13/2026</a:t>
+              <a:t>5/4/2026</a:t>
             </a:fld>
             <a:endParaRPr lang="en-US"/>
           </a:p>
@@ -3607,7 +3607,7 @@
           <a:p>
             <a:fld id="{6383FAE1-13DE-4511-8C1B-C8AFB720664C}" type="datetimeFigureOut">
               <a:rPr lang="en-US" smtClean="0"/>
-              <a:t>4/13/2026</a:t>
+              <a:t>5/4/2026</a:t>
             </a:fld>
             <a:endParaRPr lang="en-US"/>
           </a:p>
@@ -3882,7 +3882,7 @@
           <a:p>
             <a:fld id="{6383FAE1-13DE-4511-8C1B-C8AFB720664C}" type="datetimeFigureOut">
               <a:rPr lang="en-US" smtClean="0"/>
-              <a:t>4/13/2026</a:t>
+              <a:t>5/4/2026</a:t>
             </a:fld>
             <a:endParaRPr lang="en-US"/>
           </a:p>
@@ -4147,7 +4147,7 @@
           <a:p>
             <a:fld id="{6383FAE1-13DE-4511-8C1B-C8AFB720664C}" type="datetimeFigureOut">
               <a:rPr lang="en-US" smtClean="0"/>
-              <a:t>4/13/2026</a:t>
+              <a:t>5/4/2026</a:t>
             </a:fld>
             <a:endParaRPr lang="en-US"/>
           </a:p>
@@ -4559,7 +4559,7 @@
           <a:p>
             <a:fld id="{6383FAE1-13DE-4511-8C1B-C8AFB720664C}" type="datetimeFigureOut">
               <a:rPr lang="en-US" smtClean="0"/>
-              <a:t>4/13/2026</a:t>
+              <a:t>5/4/2026</a:t>
             </a:fld>
             <a:endParaRPr lang="en-US"/>
           </a:p>
@@ -4700,7 +4700,7 @@
           <a:p>
             <a:fld id="{6383FAE1-13DE-4511-8C1B-C8AFB720664C}" type="datetimeFigureOut">
               <a:rPr lang="en-US" smtClean="0"/>
-              <a:t>4/13/2026</a:t>
+              <a:t>5/4/2026</a:t>
             </a:fld>
             <a:endParaRPr lang="en-US"/>
           </a:p>
@@ -4813,7 +4813,7 @@
           <a:p>
             <a:fld id="{6383FAE1-13DE-4511-8C1B-C8AFB720664C}" type="datetimeFigureOut">
               <a:rPr lang="en-US" smtClean="0"/>
-              <a:t>4/13/2026</a:t>
+              <a:t>5/4/2026</a:t>
             </a:fld>
             <a:endParaRPr lang="en-US"/>
           </a:p>
@@ -5124,7 +5124,7 @@
           <a:p>
             <a:fld id="{6383FAE1-13DE-4511-8C1B-C8AFB720664C}" type="datetimeFigureOut">
               <a:rPr lang="en-US" smtClean="0"/>
-              <a:t>4/13/2026</a:t>
+              <a:t>5/4/2026</a:t>
             </a:fld>
             <a:endParaRPr lang="en-US"/>
           </a:p>
@@ -5415,7 +5415,7 @@
           <a:p>
             <a:fld id="{6383FAE1-13DE-4511-8C1B-C8AFB720664C}" type="datetimeFigureOut">
               <a:rPr lang="en-US" smtClean="0"/>
-              <a:t>4/13/2026</a:t>
+              <a:t>5/4/2026</a:t>
             </a:fld>
             <a:endParaRPr lang="en-US"/>
           </a:p>
@@ -5659,7 +5659,7 @@
           <a:p>
             <a:fld id="{6383FAE1-13DE-4511-8C1B-C8AFB720664C}" type="datetimeFigureOut">
               <a:rPr lang="en-US" smtClean="0"/>
-              <a:t>4/13/2026</a:t>
+              <a:t>5/4/2026</a:t>
             </a:fld>
             <a:endParaRPr lang="en-US"/>
           </a:p>
@@ -7315,8 +7315,8 @@
             <a:chExt cx="2132280" cy="744840"/>
           </a:xfrm>
         </p:grpSpPr>
-        <mc:AlternateContent xmlns:mc="http://schemas.openxmlformats.org/markup-compatibility/2006">
-          <mc:Choice xmlns:p14="http://schemas.microsoft.com/office/powerpoint/2010/main" Requires="p14">
+        <mc:AlternateContent xmlns:mc="http://schemas.openxmlformats.org/markup-compatibility/2006" xmlns:p14="http://schemas.microsoft.com/office/powerpoint/2010/main">
+          <mc:Choice Requires="p14">
             <p:contentPart p14:bwMode="auto" r:id="rId4">
               <p14:nvContentPartPr>
                 <p14:cNvPr id="4" name="Ink 3">
@@ -7335,7 +7335,7 @@
               </p14:xfrm>
             </p:contentPart>
           </mc:Choice>
-          <mc:Fallback>
+          <mc:Fallback xmlns="">
             <p:pic>
               <p:nvPicPr>
                 <p:cNvPr id="4" name="Ink 3">
@@ -7366,8 +7366,8 @@
             </p:pic>
           </mc:Fallback>
         </mc:AlternateContent>
-        <mc:AlternateContent xmlns:mc="http://schemas.openxmlformats.org/markup-compatibility/2006">
-          <mc:Choice xmlns:p14="http://schemas.microsoft.com/office/powerpoint/2010/main" Requires="p14">
+        <mc:AlternateContent xmlns:mc="http://schemas.openxmlformats.org/markup-compatibility/2006" xmlns:p14="http://schemas.microsoft.com/office/powerpoint/2010/main">
+          <mc:Choice Requires="p14">
             <p:contentPart p14:bwMode="auto" r:id="rId6">
               <p14:nvContentPartPr>
                 <p14:cNvPr id="8" name="Ink 7">
@@ -7386,7 +7386,7 @@
               </p14:xfrm>
             </p:contentPart>
           </mc:Choice>
-          <mc:Fallback>
+          <mc:Fallback xmlns="">
             <p:pic>
               <p:nvPicPr>
                 <p:cNvPr id="8" name="Ink 7">
@@ -7417,8 +7417,8 @@
             </p:pic>
           </mc:Fallback>
         </mc:AlternateContent>
-        <mc:AlternateContent xmlns:mc="http://schemas.openxmlformats.org/markup-compatibility/2006">
-          <mc:Choice xmlns:p14="http://schemas.microsoft.com/office/powerpoint/2010/main" Requires="p14">
+        <mc:AlternateContent xmlns:mc="http://schemas.openxmlformats.org/markup-compatibility/2006" xmlns:p14="http://schemas.microsoft.com/office/powerpoint/2010/main">
+          <mc:Choice Requires="p14">
             <p:contentPart p14:bwMode="auto" r:id="rId8">
               <p14:nvContentPartPr>
                 <p14:cNvPr id="9" name="Ink 8">
@@ -7437,7 +7437,7 @@
               </p14:xfrm>
             </p:contentPart>
           </mc:Choice>
-          <mc:Fallback>
+          <mc:Fallback xmlns="">
             <p:pic>
               <p:nvPicPr>
                 <p:cNvPr id="9" name="Ink 8">
@@ -7468,8 +7468,8 @@
             </p:pic>
           </mc:Fallback>
         </mc:AlternateContent>
-        <mc:AlternateContent xmlns:mc="http://schemas.openxmlformats.org/markup-compatibility/2006">
-          <mc:Choice xmlns:p14="http://schemas.microsoft.com/office/powerpoint/2010/main" Requires="p14">
+        <mc:AlternateContent xmlns:mc="http://schemas.openxmlformats.org/markup-compatibility/2006" xmlns:p14="http://schemas.microsoft.com/office/powerpoint/2010/main">
+          <mc:Choice Requires="p14">
             <p:contentPart p14:bwMode="auto" r:id="rId10">
               <p14:nvContentPartPr>
                 <p14:cNvPr id="10" name="Ink 9">
@@ -7488,7 +7488,7 @@
               </p14:xfrm>
             </p:contentPart>
           </mc:Choice>
-          <mc:Fallback>
+          <mc:Fallback xmlns="">
             <p:pic>
               <p:nvPicPr>
                 <p:cNvPr id="10" name="Ink 9">
@@ -7519,8 +7519,8 @@
             </p:pic>
           </mc:Fallback>
         </mc:AlternateContent>
-        <mc:AlternateContent xmlns:mc="http://schemas.openxmlformats.org/markup-compatibility/2006">
-          <mc:Choice xmlns:p14="http://schemas.microsoft.com/office/powerpoint/2010/main" Requires="p14">
+        <mc:AlternateContent xmlns:mc="http://schemas.openxmlformats.org/markup-compatibility/2006" xmlns:p14="http://schemas.microsoft.com/office/powerpoint/2010/main">
+          <mc:Choice Requires="p14">
             <p:contentPart p14:bwMode="auto" r:id="rId12">
               <p14:nvContentPartPr>
                 <p14:cNvPr id="11" name="Ink 10">
@@ -7539,7 +7539,7 @@
               </p14:xfrm>
             </p:contentPart>
           </mc:Choice>
-          <mc:Fallback>
+          <mc:Fallback xmlns="">
             <p:pic>
               <p:nvPicPr>
                 <p:cNvPr id="11" name="Ink 10">
@@ -7570,8 +7570,8 @@
             </p:pic>
           </mc:Fallback>
         </mc:AlternateContent>
-        <mc:AlternateContent xmlns:mc="http://schemas.openxmlformats.org/markup-compatibility/2006">
-          <mc:Choice xmlns:p14="http://schemas.microsoft.com/office/powerpoint/2010/main" Requires="p14">
+        <mc:AlternateContent xmlns:mc="http://schemas.openxmlformats.org/markup-compatibility/2006" xmlns:p14="http://schemas.microsoft.com/office/powerpoint/2010/main">
+          <mc:Choice Requires="p14">
             <p:contentPart p14:bwMode="auto" r:id="rId14">
               <p14:nvContentPartPr>
                 <p14:cNvPr id="12" name="Ink 11">
@@ -7590,7 +7590,7 @@
               </p14:xfrm>
             </p:contentPart>
           </mc:Choice>
-          <mc:Fallback>
+          <mc:Fallback xmlns="">
             <p:pic>
               <p:nvPicPr>
                 <p:cNvPr id="12" name="Ink 11">
@@ -7621,8 +7621,8 @@
             </p:pic>
           </mc:Fallback>
         </mc:AlternateContent>
-        <mc:AlternateContent xmlns:mc="http://schemas.openxmlformats.org/markup-compatibility/2006">
-          <mc:Choice xmlns:p14="http://schemas.microsoft.com/office/powerpoint/2010/main" Requires="p14">
+        <mc:AlternateContent xmlns:mc="http://schemas.openxmlformats.org/markup-compatibility/2006" xmlns:p14="http://schemas.microsoft.com/office/powerpoint/2010/main">
+          <mc:Choice Requires="p14">
             <p:contentPart p14:bwMode="auto" r:id="rId16">
               <p14:nvContentPartPr>
                 <p14:cNvPr id="13" name="Ink 12">
@@ -7641,7 +7641,7 @@
               </p14:xfrm>
             </p:contentPart>
           </mc:Choice>
-          <mc:Fallback>
+          <mc:Fallback xmlns="">
             <p:pic>
               <p:nvPicPr>
                 <p:cNvPr id="13" name="Ink 12">
@@ -7672,8 +7672,8 @@
             </p:pic>
           </mc:Fallback>
         </mc:AlternateContent>
-        <mc:AlternateContent xmlns:mc="http://schemas.openxmlformats.org/markup-compatibility/2006">
-          <mc:Choice xmlns:p14="http://schemas.microsoft.com/office/powerpoint/2010/main" Requires="p14">
+        <mc:AlternateContent xmlns:mc="http://schemas.openxmlformats.org/markup-compatibility/2006" xmlns:p14="http://schemas.microsoft.com/office/powerpoint/2010/main">
+          <mc:Choice Requires="p14">
             <p:contentPart p14:bwMode="auto" r:id="rId18">
               <p14:nvContentPartPr>
                 <p14:cNvPr id="16" name="Ink 15">
@@ -7692,7 +7692,7 @@
               </p14:xfrm>
             </p:contentPart>
           </mc:Choice>
-          <mc:Fallback>
+          <mc:Fallback xmlns="">
             <p:pic>
               <p:nvPicPr>
                 <p:cNvPr id="16" name="Ink 15">
@@ -7723,8 +7723,8 @@
             </p:pic>
           </mc:Fallback>
         </mc:AlternateContent>
-        <mc:AlternateContent xmlns:mc="http://schemas.openxmlformats.org/markup-compatibility/2006">
-          <mc:Choice xmlns:p14="http://schemas.microsoft.com/office/powerpoint/2010/main" Requires="p14">
+        <mc:AlternateContent xmlns:mc="http://schemas.openxmlformats.org/markup-compatibility/2006" xmlns:p14="http://schemas.microsoft.com/office/powerpoint/2010/main">
+          <mc:Choice Requires="p14">
             <p:contentPart p14:bwMode="auto" r:id="rId20">
               <p14:nvContentPartPr>
                 <p14:cNvPr id="17" name="Ink 16">
@@ -7743,7 +7743,7 @@
               </p14:xfrm>
             </p:contentPart>
           </mc:Choice>
-          <mc:Fallback>
+          <mc:Fallback xmlns="">
             <p:pic>
               <p:nvPicPr>
                 <p:cNvPr id="17" name="Ink 16">
@@ -7774,8 +7774,8 @@
             </p:pic>
           </mc:Fallback>
         </mc:AlternateContent>
-        <mc:AlternateContent xmlns:mc="http://schemas.openxmlformats.org/markup-compatibility/2006">
-          <mc:Choice xmlns:p14="http://schemas.microsoft.com/office/powerpoint/2010/main" Requires="p14">
+        <mc:AlternateContent xmlns:mc="http://schemas.openxmlformats.org/markup-compatibility/2006" xmlns:p14="http://schemas.microsoft.com/office/powerpoint/2010/main">
+          <mc:Choice Requires="p14">
             <p:contentPart p14:bwMode="auto" r:id="rId22">
               <p14:nvContentPartPr>
                 <p14:cNvPr id="20" name="Ink 19">
@@ -7794,7 +7794,7 @@
               </p14:xfrm>
             </p:contentPart>
           </mc:Choice>
-          <mc:Fallback>
+          <mc:Fallback xmlns="">
             <p:pic>
               <p:nvPicPr>
                 <p:cNvPr id="20" name="Ink 19">
@@ -7825,8 +7825,8 @@
             </p:pic>
           </mc:Fallback>
         </mc:AlternateContent>
-        <mc:AlternateContent xmlns:mc="http://schemas.openxmlformats.org/markup-compatibility/2006">
-          <mc:Choice xmlns:p14="http://schemas.microsoft.com/office/powerpoint/2010/main" Requires="p14">
+        <mc:AlternateContent xmlns:mc="http://schemas.openxmlformats.org/markup-compatibility/2006" xmlns:p14="http://schemas.microsoft.com/office/powerpoint/2010/main">
+          <mc:Choice Requires="p14">
             <p:contentPart p14:bwMode="auto" r:id="rId24">
               <p14:nvContentPartPr>
                 <p14:cNvPr id="22" name="Ink 21">
@@ -7845,7 +7845,7 @@
               </p14:xfrm>
             </p:contentPart>
           </mc:Choice>
-          <mc:Fallback>
+          <mc:Fallback xmlns="">
             <p:pic>
               <p:nvPicPr>
                 <p:cNvPr id="22" name="Ink 21">
@@ -7876,8 +7876,8 @@
             </p:pic>
           </mc:Fallback>
         </mc:AlternateContent>
-        <mc:AlternateContent xmlns:mc="http://schemas.openxmlformats.org/markup-compatibility/2006">
-          <mc:Choice xmlns:p14="http://schemas.microsoft.com/office/powerpoint/2010/main" Requires="p14">
+        <mc:AlternateContent xmlns:mc="http://schemas.openxmlformats.org/markup-compatibility/2006" xmlns:p14="http://schemas.microsoft.com/office/powerpoint/2010/main">
+          <mc:Choice Requires="p14">
             <p:contentPart p14:bwMode="auto" r:id="rId26">
               <p14:nvContentPartPr>
                 <p14:cNvPr id="24" name="Ink 23">
@@ -7896,7 +7896,7 @@
               </p14:xfrm>
             </p:contentPart>
           </mc:Choice>
-          <mc:Fallback>
+          <mc:Fallback xmlns="">
             <p:pic>
               <p:nvPicPr>
                 <p:cNvPr id="24" name="Ink 23">
@@ -7927,8 +7927,8 @@
             </p:pic>
           </mc:Fallback>
         </mc:AlternateContent>
-        <mc:AlternateContent xmlns:mc="http://schemas.openxmlformats.org/markup-compatibility/2006">
-          <mc:Choice xmlns:p14="http://schemas.microsoft.com/office/powerpoint/2010/main" Requires="p14">
+        <mc:AlternateContent xmlns:mc="http://schemas.openxmlformats.org/markup-compatibility/2006" xmlns:p14="http://schemas.microsoft.com/office/powerpoint/2010/main">
+          <mc:Choice Requires="p14">
             <p:contentPart p14:bwMode="auto" r:id="rId28">
               <p14:nvContentPartPr>
                 <p14:cNvPr id="25" name="Ink 24">
@@ -7947,7 +7947,7 @@
               </p14:xfrm>
             </p:contentPart>
           </mc:Choice>
-          <mc:Fallback>
+          <mc:Fallback xmlns="">
             <p:pic>
               <p:nvPicPr>
                 <p:cNvPr id="25" name="Ink 24">
@@ -7978,8 +7978,8 @@
             </p:pic>
           </mc:Fallback>
         </mc:AlternateContent>
-        <mc:AlternateContent xmlns:mc="http://schemas.openxmlformats.org/markup-compatibility/2006">
-          <mc:Choice xmlns:p14="http://schemas.microsoft.com/office/powerpoint/2010/main" Requires="p14">
+        <mc:AlternateContent xmlns:mc="http://schemas.openxmlformats.org/markup-compatibility/2006" xmlns:p14="http://schemas.microsoft.com/office/powerpoint/2010/main">
+          <mc:Choice Requires="p14">
             <p:contentPart p14:bwMode="auto" r:id="rId30">
               <p14:nvContentPartPr>
                 <p14:cNvPr id="26" name="Ink 25">
@@ -7998,7 +7998,7 @@
               </p14:xfrm>
             </p:contentPart>
           </mc:Choice>
-          <mc:Fallback>
+          <mc:Fallback xmlns="">
             <p:pic>
               <p:nvPicPr>
                 <p:cNvPr id="26" name="Ink 25">
@@ -8029,8 +8029,8 @@
             </p:pic>
           </mc:Fallback>
         </mc:AlternateContent>
-        <mc:AlternateContent xmlns:mc="http://schemas.openxmlformats.org/markup-compatibility/2006">
-          <mc:Choice xmlns:p14="http://schemas.microsoft.com/office/powerpoint/2010/main" Requires="p14">
+        <mc:AlternateContent xmlns:mc="http://schemas.openxmlformats.org/markup-compatibility/2006" xmlns:p14="http://schemas.microsoft.com/office/powerpoint/2010/main">
+          <mc:Choice Requires="p14">
             <p:contentPart p14:bwMode="auto" r:id="rId32">
               <p14:nvContentPartPr>
                 <p14:cNvPr id="27" name="Ink 26">
@@ -8049,7 +8049,7 @@
               </p14:xfrm>
             </p:contentPart>
           </mc:Choice>
-          <mc:Fallback>
+          <mc:Fallback xmlns="">
             <p:pic>
               <p:nvPicPr>
                 <p:cNvPr id="27" name="Ink 26">
@@ -8080,8 +8080,8 @@
             </p:pic>
           </mc:Fallback>
         </mc:AlternateContent>
-        <mc:AlternateContent xmlns:mc="http://schemas.openxmlformats.org/markup-compatibility/2006">
-          <mc:Choice xmlns:p14="http://schemas.microsoft.com/office/powerpoint/2010/main" Requires="p14">
+        <mc:AlternateContent xmlns:mc="http://schemas.openxmlformats.org/markup-compatibility/2006" xmlns:p14="http://schemas.microsoft.com/office/powerpoint/2010/main">
+          <mc:Choice Requires="p14">
             <p:contentPart p14:bwMode="auto" r:id="rId34">
               <p14:nvContentPartPr>
                 <p14:cNvPr id="28" name="Ink 27">
@@ -8100,7 +8100,7 @@
               </p14:xfrm>
             </p:contentPart>
           </mc:Choice>
-          <mc:Fallback>
+          <mc:Fallback xmlns="">
             <p:pic>
               <p:nvPicPr>
                 <p:cNvPr id="28" name="Ink 27">
@@ -8131,8 +8131,8 @@
             </p:pic>
           </mc:Fallback>
         </mc:AlternateContent>
-        <mc:AlternateContent xmlns:mc="http://schemas.openxmlformats.org/markup-compatibility/2006">
-          <mc:Choice xmlns:p14="http://schemas.microsoft.com/office/powerpoint/2010/main" Requires="p14">
+        <mc:AlternateContent xmlns:mc="http://schemas.openxmlformats.org/markup-compatibility/2006" xmlns:p14="http://schemas.microsoft.com/office/powerpoint/2010/main">
+          <mc:Choice Requires="p14">
             <p:contentPart p14:bwMode="auto" r:id="rId36">
               <p14:nvContentPartPr>
                 <p14:cNvPr id="29" name="Ink 28">
@@ -8151,7 +8151,7 @@
               </p14:xfrm>
             </p:contentPart>
           </mc:Choice>
-          <mc:Fallback>
+          <mc:Fallback xmlns="">
             <p:pic>
               <p:nvPicPr>
                 <p:cNvPr id="29" name="Ink 28">
@@ -8182,8 +8182,8 @@
             </p:pic>
           </mc:Fallback>
         </mc:AlternateContent>
-        <mc:AlternateContent xmlns:mc="http://schemas.openxmlformats.org/markup-compatibility/2006">
-          <mc:Choice xmlns:p14="http://schemas.microsoft.com/office/powerpoint/2010/main" Requires="p14">
+        <mc:AlternateContent xmlns:mc="http://schemas.openxmlformats.org/markup-compatibility/2006" xmlns:p14="http://schemas.microsoft.com/office/powerpoint/2010/main">
+          <mc:Choice Requires="p14">
             <p:contentPart p14:bwMode="auto" r:id="rId38">
               <p14:nvContentPartPr>
                 <p14:cNvPr id="30" name="Ink 29">
@@ -8202,7 +8202,7 @@
               </p14:xfrm>
             </p:contentPart>
           </mc:Choice>
-          <mc:Fallback>
+          <mc:Fallback xmlns="">
             <p:pic>
               <p:nvPicPr>
                 <p:cNvPr id="30" name="Ink 29">
@@ -8233,8 +8233,8 @@
             </p:pic>
           </mc:Fallback>
         </mc:AlternateContent>
-        <mc:AlternateContent xmlns:mc="http://schemas.openxmlformats.org/markup-compatibility/2006">
-          <mc:Choice xmlns:p14="http://schemas.microsoft.com/office/powerpoint/2010/main" Requires="p14">
+        <mc:AlternateContent xmlns:mc="http://schemas.openxmlformats.org/markup-compatibility/2006" xmlns:p14="http://schemas.microsoft.com/office/powerpoint/2010/main">
+          <mc:Choice Requires="p14">
             <p:contentPart p14:bwMode="auto" r:id="rId40">
               <p14:nvContentPartPr>
                 <p14:cNvPr id="31" name="Ink 30">
@@ -8253,7 +8253,7 @@
               </p14:xfrm>
             </p:contentPart>
           </mc:Choice>
-          <mc:Fallback>
+          <mc:Fallback xmlns="">
             <p:pic>
               <p:nvPicPr>
                 <p:cNvPr id="31" name="Ink 30">
@@ -8284,8 +8284,8 @@
             </p:pic>
           </mc:Fallback>
         </mc:AlternateContent>
-        <mc:AlternateContent xmlns:mc="http://schemas.openxmlformats.org/markup-compatibility/2006">
-          <mc:Choice xmlns:p14="http://schemas.microsoft.com/office/powerpoint/2010/main" Requires="p14">
+        <mc:AlternateContent xmlns:mc="http://schemas.openxmlformats.org/markup-compatibility/2006" xmlns:p14="http://schemas.microsoft.com/office/powerpoint/2010/main">
+          <mc:Choice Requires="p14">
             <p:contentPart p14:bwMode="auto" r:id="rId42">
               <p14:nvContentPartPr>
                 <p14:cNvPr id="32" name="Ink 31">
@@ -8304,7 +8304,7 @@
               </p14:xfrm>
             </p:contentPart>
           </mc:Choice>
-          <mc:Fallback>
+          <mc:Fallback xmlns="">
             <p:pic>
               <p:nvPicPr>
                 <p:cNvPr id="32" name="Ink 31">
@@ -8335,8 +8335,8 @@
             </p:pic>
           </mc:Fallback>
         </mc:AlternateContent>
-        <mc:AlternateContent xmlns:mc="http://schemas.openxmlformats.org/markup-compatibility/2006">
-          <mc:Choice xmlns:p14="http://schemas.microsoft.com/office/powerpoint/2010/main" Requires="p14">
+        <mc:AlternateContent xmlns:mc="http://schemas.openxmlformats.org/markup-compatibility/2006" xmlns:p14="http://schemas.microsoft.com/office/powerpoint/2010/main">
+          <mc:Choice Requires="p14">
             <p:contentPart p14:bwMode="auto" r:id="rId44">
               <p14:nvContentPartPr>
                 <p14:cNvPr id="33" name="Ink 32">
@@ -8355,7 +8355,7 @@
               </p14:xfrm>
             </p:contentPart>
           </mc:Choice>
-          <mc:Fallback>
+          <mc:Fallback xmlns="">
             <p:pic>
               <p:nvPicPr>
                 <p:cNvPr id="33" name="Ink 32">
@@ -9750,8 +9750,8 @@
             <a:chExt cx="2364412" cy="588960"/>
           </a:xfrm>
         </p:grpSpPr>
-        <mc:AlternateContent xmlns:mc="http://schemas.openxmlformats.org/markup-compatibility/2006">
-          <mc:Choice xmlns:p14="http://schemas.microsoft.com/office/powerpoint/2010/main" Requires="p14">
+        <mc:AlternateContent xmlns:mc="http://schemas.openxmlformats.org/markup-compatibility/2006" xmlns:p14="http://schemas.microsoft.com/office/powerpoint/2010/main">
+          <mc:Choice Requires="p14">
             <p:contentPart p14:bwMode="auto" r:id="rId4">
               <p14:nvContentPartPr>
                 <p14:cNvPr id="4" name="Ink 3">
@@ -9770,7 +9770,7 @@
               </p14:xfrm>
             </p:contentPart>
           </mc:Choice>
-          <mc:Fallback>
+          <mc:Fallback xmlns="">
             <p:pic>
               <p:nvPicPr>
                 <p:cNvPr id="4" name="Ink 3">
@@ -9801,8 +9801,8 @@
             </p:pic>
           </mc:Fallback>
         </mc:AlternateContent>
-        <mc:AlternateContent xmlns:mc="http://schemas.openxmlformats.org/markup-compatibility/2006">
-          <mc:Choice xmlns:p14="http://schemas.microsoft.com/office/powerpoint/2010/main" Requires="p14">
+        <mc:AlternateContent xmlns:mc="http://schemas.openxmlformats.org/markup-compatibility/2006" xmlns:p14="http://schemas.microsoft.com/office/powerpoint/2010/main">
+          <mc:Choice Requires="p14">
             <p:contentPart p14:bwMode="auto" r:id="rId6">
               <p14:nvContentPartPr>
                 <p14:cNvPr id="5" name="Ink 4">
@@ -9821,7 +9821,7 @@
               </p14:xfrm>
             </p:contentPart>
           </mc:Choice>
-          <mc:Fallback>
+          <mc:Fallback xmlns="">
             <p:pic>
               <p:nvPicPr>
                 <p:cNvPr id="5" name="Ink 4">
@@ -9852,8 +9852,8 @@
             </p:pic>
           </mc:Fallback>
         </mc:AlternateContent>
-        <mc:AlternateContent xmlns:mc="http://schemas.openxmlformats.org/markup-compatibility/2006">
-          <mc:Choice xmlns:p14="http://schemas.microsoft.com/office/powerpoint/2010/main" Requires="p14">
+        <mc:AlternateContent xmlns:mc="http://schemas.openxmlformats.org/markup-compatibility/2006" xmlns:p14="http://schemas.microsoft.com/office/powerpoint/2010/main">
+          <mc:Choice Requires="p14">
             <p:contentPart p14:bwMode="auto" r:id="rId8">
               <p14:nvContentPartPr>
                 <p14:cNvPr id="6" name="Ink 5">
@@ -9872,7 +9872,7 @@
               </p14:xfrm>
             </p:contentPart>
           </mc:Choice>
-          <mc:Fallback>
+          <mc:Fallback xmlns="">
             <p:pic>
               <p:nvPicPr>
                 <p:cNvPr id="6" name="Ink 5">
@@ -9903,8 +9903,8 @@
             </p:pic>
           </mc:Fallback>
         </mc:AlternateContent>
-        <mc:AlternateContent xmlns:mc="http://schemas.openxmlformats.org/markup-compatibility/2006">
-          <mc:Choice xmlns:p14="http://schemas.microsoft.com/office/powerpoint/2010/main" Requires="p14">
+        <mc:AlternateContent xmlns:mc="http://schemas.openxmlformats.org/markup-compatibility/2006" xmlns:p14="http://schemas.microsoft.com/office/powerpoint/2010/main">
+          <mc:Choice Requires="p14">
             <p:contentPart p14:bwMode="auto" r:id="rId10">
               <p14:nvContentPartPr>
                 <p14:cNvPr id="9" name="Ink 8">
@@ -9923,7 +9923,7 @@
               </p14:xfrm>
             </p:contentPart>
           </mc:Choice>
-          <mc:Fallback>
+          <mc:Fallback xmlns="">
             <p:pic>
               <p:nvPicPr>
                 <p:cNvPr id="9" name="Ink 8">
@@ -9954,8 +9954,8 @@
             </p:pic>
           </mc:Fallback>
         </mc:AlternateContent>
-        <mc:AlternateContent xmlns:mc="http://schemas.openxmlformats.org/markup-compatibility/2006">
-          <mc:Choice xmlns:p14="http://schemas.microsoft.com/office/powerpoint/2010/main" Requires="p14">
+        <mc:AlternateContent xmlns:mc="http://schemas.openxmlformats.org/markup-compatibility/2006" xmlns:p14="http://schemas.microsoft.com/office/powerpoint/2010/main">
+          <mc:Choice Requires="p14">
             <p:contentPart p14:bwMode="auto" r:id="rId12">
               <p14:nvContentPartPr>
                 <p14:cNvPr id="11" name="Ink 10">
@@ -9974,7 +9974,7 @@
               </p14:xfrm>
             </p:contentPart>
           </mc:Choice>
-          <mc:Fallback>
+          <mc:Fallback xmlns="">
             <p:pic>
               <p:nvPicPr>
                 <p:cNvPr id="11" name="Ink 10">
@@ -10005,8 +10005,8 @@
             </p:pic>
           </mc:Fallback>
         </mc:AlternateContent>
-        <mc:AlternateContent xmlns:mc="http://schemas.openxmlformats.org/markup-compatibility/2006">
-          <mc:Choice xmlns:p14="http://schemas.microsoft.com/office/powerpoint/2010/main" Requires="p14">
+        <mc:AlternateContent xmlns:mc="http://schemas.openxmlformats.org/markup-compatibility/2006" xmlns:p14="http://schemas.microsoft.com/office/powerpoint/2010/main">
+          <mc:Choice Requires="p14">
             <p:contentPart p14:bwMode="auto" r:id="rId14">
               <p14:nvContentPartPr>
                 <p14:cNvPr id="12" name="Ink 11">
@@ -10025,7 +10025,7 @@
               </p14:xfrm>
             </p:contentPart>
           </mc:Choice>
-          <mc:Fallback>
+          <mc:Fallback xmlns="">
             <p:pic>
               <p:nvPicPr>
                 <p:cNvPr id="12" name="Ink 11">
@@ -10056,8 +10056,8 @@
             </p:pic>
           </mc:Fallback>
         </mc:AlternateContent>
-        <mc:AlternateContent xmlns:mc="http://schemas.openxmlformats.org/markup-compatibility/2006">
-          <mc:Choice xmlns:p14="http://schemas.microsoft.com/office/powerpoint/2010/main" Requires="p14">
+        <mc:AlternateContent xmlns:mc="http://schemas.openxmlformats.org/markup-compatibility/2006" xmlns:p14="http://schemas.microsoft.com/office/powerpoint/2010/main">
+          <mc:Choice Requires="p14">
             <p:contentPart p14:bwMode="auto" r:id="rId16">
               <p14:nvContentPartPr>
                 <p14:cNvPr id="13" name="Ink 12">
@@ -10076,7 +10076,7 @@
               </p14:xfrm>
             </p:contentPart>
           </mc:Choice>
-          <mc:Fallback>
+          <mc:Fallback xmlns="">
             <p:pic>
               <p:nvPicPr>
                 <p:cNvPr id="13" name="Ink 12">
@@ -10107,8 +10107,8 @@
             </p:pic>
           </mc:Fallback>
         </mc:AlternateContent>
-        <mc:AlternateContent xmlns:mc="http://schemas.openxmlformats.org/markup-compatibility/2006">
-          <mc:Choice xmlns:p14="http://schemas.microsoft.com/office/powerpoint/2010/main" Requires="p14">
+        <mc:AlternateContent xmlns:mc="http://schemas.openxmlformats.org/markup-compatibility/2006" xmlns:p14="http://schemas.microsoft.com/office/powerpoint/2010/main">
+          <mc:Choice Requires="p14">
             <p:contentPart p14:bwMode="auto" r:id="rId18">
               <p14:nvContentPartPr>
                 <p14:cNvPr id="15" name="Ink 14">
@@ -10127,7 +10127,7 @@
               </p14:xfrm>
             </p:contentPart>
           </mc:Choice>
-          <mc:Fallback>
+          <mc:Fallback xmlns="">
             <p:pic>
               <p:nvPicPr>
                 <p:cNvPr id="15" name="Ink 14">
@@ -10158,8 +10158,8 @@
             </p:pic>
           </mc:Fallback>
         </mc:AlternateContent>
-        <mc:AlternateContent xmlns:mc="http://schemas.openxmlformats.org/markup-compatibility/2006">
-          <mc:Choice xmlns:p14="http://schemas.microsoft.com/office/powerpoint/2010/main" Requires="p14">
+        <mc:AlternateContent xmlns:mc="http://schemas.openxmlformats.org/markup-compatibility/2006" xmlns:p14="http://schemas.microsoft.com/office/powerpoint/2010/main">
+          <mc:Choice Requires="p14">
             <p:contentPart p14:bwMode="auto" r:id="rId20">
               <p14:nvContentPartPr>
                 <p14:cNvPr id="16" name="Ink 15">
@@ -10178,7 +10178,7 @@
               </p14:xfrm>
             </p:contentPart>
           </mc:Choice>
-          <mc:Fallback>
+          <mc:Fallback xmlns="">
             <p:pic>
               <p:nvPicPr>
                 <p:cNvPr id="16" name="Ink 15">
@@ -10209,8 +10209,8 @@
             </p:pic>
           </mc:Fallback>
         </mc:AlternateContent>
-        <mc:AlternateContent xmlns:mc="http://schemas.openxmlformats.org/markup-compatibility/2006">
-          <mc:Choice xmlns:p14="http://schemas.microsoft.com/office/powerpoint/2010/main" Requires="p14">
+        <mc:AlternateContent xmlns:mc="http://schemas.openxmlformats.org/markup-compatibility/2006" xmlns:p14="http://schemas.microsoft.com/office/powerpoint/2010/main">
+          <mc:Choice Requires="p14">
             <p:contentPart p14:bwMode="auto" r:id="rId22">
               <p14:nvContentPartPr>
                 <p14:cNvPr id="19" name="Ink 18">
@@ -10229,7 +10229,7 @@
               </p14:xfrm>
             </p:contentPart>
           </mc:Choice>
-          <mc:Fallback>
+          <mc:Fallback xmlns="">
             <p:pic>
               <p:nvPicPr>
                 <p:cNvPr id="19" name="Ink 18">
@@ -10260,8 +10260,8 @@
             </p:pic>
           </mc:Fallback>
         </mc:AlternateContent>
-        <mc:AlternateContent xmlns:mc="http://schemas.openxmlformats.org/markup-compatibility/2006">
-          <mc:Choice xmlns:p14="http://schemas.microsoft.com/office/powerpoint/2010/main" Requires="p14">
+        <mc:AlternateContent xmlns:mc="http://schemas.openxmlformats.org/markup-compatibility/2006" xmlns:p14="http://schemas.microsoft.com/office/powerpoint/2010/main">
+          <mc:Choice Requires="p14">
             <p:contentPart p14:bwMode="auto" r:id="rId24">
               <p14:nvContentPartPr>
                 <p14:cNvPr id="22" name="Ink 21">
@@ -10280,7 +10280,7 @@
               </p14:xfrm>
             </p:contentPart>
           </mc:Choice>
-          <mc:Fallback>
+          <mc:Fallback xmlns="">
             <p:pic>
               <p:nvPicPr>
                 <p:cNvPr id="22" name="Ink 21">
@@ -10311,8 +10311,8 @@
             </p:pic>
           </mc:Fallback>
         </mc:AlternateContent>
-        <mc:AlternateContent xmlns:mc="http://schemas.openxmlformats.org/markup-compatibility/2006">
-          <mc:Choice xmlns:p14="http://schemas.microsoft.com/office/powerpoint/2010/main" Requires="p14">
+        <mc:AlternateContent xmlns:mc="http://schemas.openxmlformats.org/markup-compatibility/2006" xmlns:p14="http://schemas.microsoft.com/office/powerpoint/2010/main">
+          <mc:Choice Requires="p14">
             <p:contentPart p14:bwMode="auto" r:id="rId26">
               <p14:nvContentPartPr>
                 <p14:cNvPr id="23" name="Ink 22">
@@ -10331,7 +10331,7 @@
               </p14:xfrm>
             </p:contentPart>
           </mc:Choice>
-          <mc:Fallback>
+          <mc:Fallback xmlns="">
             <p:pic>
               <p:nvPicPr>
                 <p:cNvPr id="23" name="Ink 22">
@@ -10362,8 +10362,8 @@
             </p:pic>
           </mc:Fallback>
         </mc:AlternateContent>
-        <mc:AlternateContent xmlns:mc="http://schemas.openxmlformats.org/markup-compatibility/2006">
-          <mc:Choice xmlns:p14="http://schemas.microsoft.com/office/powerpoint/2010/main" Requires="p14">
+        <mc:AlternateContent xmlns:mc="http://schemas.openxmlformats.org/markup-compatibility/2006" xmlns:p14="http://schemas.microsoft.com/office/powerpoint/2010/main">
+          <mc:Choice Requires="p14">
             <p:contentPart p14:bwMode="auto" r:id="rId28">
               <p14:nvContentPartPr>
                 <p14:cNvPr id="24" name="Ink 23">
@@ -10382,7 +10382,7 @@
               </p14:xfrm>
             </p:contentPart>
           </mc:Choice>
-          <mc:Fallback>
+          <mc:Fallback xmlns="">
             <p:pic>
               <p:nvPicPr>
                 <p:cNvPr id="24" name="Ink 23">
@@ -10413,8 +10413,8 @@
             </p:pic>
           </mc:Fallback>
         </mc:AlternateContent>
-        <mc:AlternateContent xmlns:mc="http://schemas.openxmlformats.org/markup-compatibility/2006">
-          <mc:Choice xmlns:p14="http://schemas.microsoft.com/office/powerpoint/2010/main" Requires="p14">
+        <mc:AlternateContent xmlns:mc="http://schemas.openxmlformats.org/markup-compatibility/2006" xmlns:p14="http://schemas.microsoft.com/office/powerpoint/2010/main">
+          <mc:Choice Requires="p14">
             <p:contentPart p14:bwMode="auto" r:id="rId30">
               <p14:nvContentPartPr>
                 <p14:cNvPr id="25" name="Ink 24">
@@ -10433,7 +10433,7 @@
               </p14:xfrm>
             </p:contentPart>
           </mc:Choice>
-          <mc:Fallback>
+          <mc:Fallback xmlns="">
             <p:pic>
               <p:nvPicPr>
                 <p:cNvPr id="25" name="Ink 24">
@@ -10464,8 +10464,8 @@
             </p:pic>
           </mc:Fallback>
         </mc:AlternateContent>
-        <mc:AlternateContent xmlns:mc="http://schemas.openxmlformats.org/markup-compatibility/2006">
-          <mc:Choice xmlns:p14="http://schemas.microsoft.com/office/powerpoint/2010/main" Requires="p14">
+        <mc:AlternateContent xmlns:mc="http://schemas.openxmlformats.org/markup-compatibility/2006" xmlns:p14="http://schemas.microsoft.com/office/powerpoint/2010/main">
+          <mc:Choice Requires="p14">
             <p:contentPart p14:bwMode="auto" r:id="rId32">
               <p14:nvContentPartPr>
                 <p14:cNvPr id="26" name="Ink 25">
@@ -10484,7 +10484,7 @@
               </p14:xfrm>
             </p:contentPart>
           </mc:Choice>
-          <mc:Fallback>
+          <mc:Fallback xmlns="">
             <p:pic>
               <p:nvPicPr>
                 <p:cNvPr id="26" name="Ink 25">
@@ -10515,8 +10515,8 @@
             </p:pic>
           </mc:Fallback>
         </mc:AlternateContent>
-        <mc:AlternateContent xmlns:mc="http://schemas.openxmlformats.org/markup-compatibility/2006">
-          <mc:Choice xmlns:p14="http://schemas.microsoft.com/office/powerpoint/2010/main" Requires="p14">
+        <mc:AlternateContent xmlns:mc="http://schemas.openxmlformats.org/markup-compatibility/2006" xmlns:p14="http://schemas.microsoft.com/office/powerpoint/2010/main">
+          <mc:Choice Requires="p14">
             <p:contentPart p14:bwMode="auto" r:id="rId34">
               <p14:nvContentPartPr>
                 <p14:cNvPr id="27" name="Ink 26">
@@ -10535,7 +10535,7 @@
               </p14:xfrm>
             </p:contentPart>
           </mc:Choice>
-          <mc:Fallback>
+          <mc:Fallback xmlns="">
             <p:pic>
               <p:nvPicPr>
                 <p:cNvPr id="27" name="Ink 26">
@@ -10566,8 +10566,8 @@
             </p:pic>
           </mc:Fallback>
         </mc:AlternateContent>
-        <mc:AlternateContent xmlns:mc="http://schemas.openxmlformats.org/markup-compatibility/2006">
-          <mc:Choice xmlns:p14="http://schemas.microsoft.com/office/powerpoint/2010/main" Requires="p14">
+        <mc:AlternateContent xmlns:mc="http://schemas.openxmlformats.org/markup-compatibility/2006" xmlns:p14="http://schemas.microsoft.com/office/powerpoint/2010/main">
+          <mc:Choice Requires="p14">
             <p:contentPart p14:bwMode="auto" r:id="rId36">
               <p14:nvContentPartPr>
                 <p14:cNvPr id="28" name="Ink 27">
@@ -10586,7 +10586,7 @@
               </p14:xfrm>
             </p:contentPart>
           </mc:Choice>
-          <mc:Fallback>
+          <mc:Fallback xmlns="">
             <p:pic>
               <p:nvPicPr>
                 <p:cNvPr id="28" name="Ink 27">
@@ -10617,8 +10617,8 @@
             </p:pic>
           </mc:Fallback>
         </mc:AlternateContent>
-        <mc:AlternateContent xmlns:mc="http://schemas.openxmlformats.org/markup-compatibility/2006">
-          <mc:Choice xmlns:p14="http://schemas.microsoft.com/office/powerpoint/2010/main" Requires="p14">
+        <mc:AlternateContent xmlns:mc="http://schemas.openxmlformats.org/markup-compatibility/2006" xmlns:p14="http://schemas.microsoft.com/office/powerpoint/2010/main">
+          <mc:Choice Requires="p14">
             <p:contentPart p14:bwMode="auto" r:id="rId38">
               <p14:nvContentPartPr>
                 <p14:cNvPr id="29" name="Ink 28">
@@ -10637,7 +10637,7 @@
               </p14:xfrm>
             </p:contentPart>
           </mc:Choice>
-          <mc:Fallback>
+          <mc:Fallback xmlns="">
             <p:pic>
               <p:nvPicPr>
                 <p:cNvPr id="29" name="Ink 28">
@@ -10668,8 +10668,8 @@
             </p:pic>
           </mc:Fallback>
         </mc:AlternateContent>
-        <mc:AlternateContent xmlns:mc="http://schemas.openxmlformats.org/markup-compatibility/2006">
-          <mc:Choice xmlns:p14="http://schemas.microsoft.com/office/powerpoint/2010/main" Requires="p14">
+        <mc:AlternateContent xmlns:mc="http://schemas.openxmlformats.org/markup-compatibility/2006" xmlns:p14="http://schemas.microsoft.com/office/powerpoint/2010/main">
+          <mc:Choice Requires="p14">
             <p:contentPart p14:bwMode="auto" r:id="rId40">
               <p14:nvContentPartPr>
                 <p14:cNvPr id="30" name="Ink 29">
@@ -10688,7 +10688,7 @@
               </p14:xfrm>
             </p:contentPart>
           </mc:Choice>
-          <mc:Fallback>
+          <mc:Fallback xmlns="">
             <p:pic>
               <p:nvPicPr>
                 <p:cNvPr id="30" name="Ink 29">
@@ -10719,8 +10719,8 @@
             </p:pic>
           </mc:Fallback>
         </mc:AlternateContent>
-        <mc:AlternateContent xmlns:mc="http://schemas.openxmlformats.org/markup-compatibility/2006">
-          <mc:Choice xmlns:p14="http://schemas.microsoft.com/office/powerpoint/2010/main" Requires="p14">
+        <mc:AlternateContent xmlns:mc="http://schemas.openxmlformats.org/markup-compatibility/2006" xmlns:p14="http://schemas.microsoft.com/office/powerpoint/2010/main">
+          <mc:Choice Requires="p14">
             <p:contentPart p14:bwMode="auto" r:id="rId42">
               <p14:nvContentPartPr>
                 <p14:cNvPr id="31" name="Ink 30">
@@ -10739,7 +10739,7 @@
               </p14:xfrm>
             </p:contentPart>
           </mc:Choice>
-          <mc:Fallback>
+          <mc:Fallback xmlns="">
             <p:pic>
               <p:nvPicPr>
                 <p:cNvPr id="31" name="Ink 30">
@@ -10770,8 +10770,8 @@
             </p:pic>
           </mc:Fallback>
         </mc:AlternateContent>
-        <mc:AlternateContent xmlns:mc="http://schemas.openxmlformats.org/markup-compatibility/2006">
-          <mc:Choice xmlns:p14="http://schemas.microsoft.com/office/powerpoint/2010/main" Requires="p14">
+        <mc:AlternateContent xmlns:mc="http://schemas.openxmlformats.org/markup-compatibility/2006" xmlns:p14="http://schemas.microsoft.com/office/powerpoint/2010/main">
+          <mc:Choice Requires="p14">
             <p:contentPart p14:bwMode="auto" r:id="rId44">
               <p14:nvContentPartPr>
                 <p14:cNvPr id="33" name="Ink 32">
@@ -10790,7 +10790,7 @@
               </p14:xfrm>
             </p:contentPart>
           </mc:Choice>
-          <mc:Fallback>
+          <mc:Fallback xmlns="">
             <p:pic>
               <p:nvPicPr>
                 <p:cNvPr id="33" name="Ink 32">
@@ -10821,8 +10821,8 @@
             </p:pic>
           </mc:Fallback>
         </mc:AlternateContent>
-        <mc:AlternateContent xmlns:mc="http://schemas.openxmlformats.org/markup-compatibility/2006">
-          <mc:Choice xmlns:p14="http://schemas.microsoft.com/office/powerpoint/2010/main" Requires="p14">
+        <mc:AlternateContent xmlns:mc="http://schemas.openxmlformats.org/markup-compatibility/2006" xmlns:p14="http://schemas.microsoft.com/office/powerpoint/2010/main">
+          <mc:Choice Requires="p14">
             <p:contentPart p14:bwMode="auto" r:id="rId46">
               <p14:nvContentPartPr>
                 <p14:cNvPr id="34" name="Ink 33">
@@ -10841,7 +10841,7 @@
               </p14:xfrm>
             </p:contentPart>
           </mc:Choice>
-          <mc:Fallback>
+          <mc:Fallback xmlns="">
             <p:pic>
               <p:nvPicPr>
                 <p:cNvPr id="34" name="Ink 33">
@@ -10872,8 +10872,8 @@
             </p:pic>
           </mc:Fallback>
         </mc:AlternateContent>
-        <mc:AlternateContent xmlns:mc="http://schemas.openxmlformats.org/markup-compatibility/2006">
-          <mc:Choice xmlns:p14="http://schemas.microsoft.com/office/powerpoint/2010/main" Requires="p14">
+        <mc:AlternateContent xmlns:mc="http://schemas.openxmlformats.org/markup-compatibility/2006" xmlns:p14="http://schemas.microsoft.com/office/powerpoint/2010/main">
+          <mc:Choice Requires="p14">
             <p:contentPart p14:bwMode="auto" r:id="rId48">
               <p14:nvContentPartPr>
                 <p14:cNvPr id="35" name="Ink 34">
@@ -10892,7 +10892,7 @@
               </p14:xfrm>
             </p:contentPart>
           </mc:Choice>
-          <mc:Fallback>
+          <mc:Fallback xmlns="">
             <p:pic>
               <p:nvPicPr>
                 <p:cNvPr id="35" name="Ink 34">
@@ -10923,8 +10923,8 @@
             </p:pic>
           </mc:Fallback>
         </mc:AlternateContent>
-        <mc:AlternateContent xmlns:mc="http://schemas.openxmlformats.org/markup-compatibility/2006">
-          <mc:Choice xmlns:p14="http://schemas.microsoft.com/office/powerpoint/2010/main" Requires="p14">
+        <mc:AlternateContent xmlns:mc="http://schemas.openxmlformats.org/markup-compatibility/2006" xmlns:p14="http://schemas.microsoft.com/office/powerpoint/2010/main">
+          <mc:Choice Requires="p14">
             <p:contentPart p14:bwMode="auto" r:id="rId50">
               <p14:nvContentPartPr>
                 <p14:cNvPr id="36" name="Ink 35">
@@ -10943,7 +10943,7 @@
               </p14:xfrm>
             </p:contentPart>
           </mc:Choice>
-          <mc:Fallback>
+          <mc:Fallback xmlns="">
             <p:pic>
               <p:nvPicPr>
                 <p:cNvPr id="36" name="Ink 35">
@@ -10974,8 +10974,8 @@
             </p:pic>
           </mc:Fallback>
         </mc:AlternateContent>
-        <mc:AlternateContent xmlns:mc="http://schemas.openxmlformats.org/markup-compatibility/2006">
-          <mc:Choice xmlns:p14="http://schemas.microsoft.com/office/powerpoint/2010/main" Requires="p14">
+        <mc:AlternateContent xmlns:mc="http://schemas.openxmlformats.org/markup-compatibility/2006" xmlns:p14="http://schemas.microsoft.com/office/powerpoint/2010/main">
+          <mc:Choice Requires="p14">
             <p:contentPart p14:bwMode="auto" r:id="rId52">
               <p14:nvContentPartPr>
                 <p14:cNvPr id="38" name="Ink 37">
@@ -10994,7 +10994,7 @@
               </p14:xfrm>
             </p:contentPart>
           </mc:Choice>
-          <mc:Fallback>
+          <mc:Fallback xmlns="">
             <p:pic>
               <p:nvPicPr>
                 <p:cNvPr id="38" name="Ink 37">
@@ -11025,8 +11025,8 @@
             </p:pic>
           </mc:Fallback>
         </mc:AlternateContent>
-        <mc:AlternateContent xmlns:mc="http://schemas.openxmlformats.org/markup-compatibility/2006">
-          <mc:Choice xmlns:p14="http://schemas.microsoft.com/office/powerpoint/2010/main" Requires="p14">
+        <mc:AlternateContent xmlns:mc="http://schemas.openxmlformats.org/markup-compatibility/2006" xmlns:p14="http://schemas.microsoft.com/office/powerpoint/2010/main">
+          <mc:Choice Requires="p14">
             <p:contentPart p14:bwMode="auto" r:id="rId54">
               <p14:nvContentPartPr>
                 <p14:cNvPr id="39" name="Ink 38">
@@ -11045,7 +11045,7 @@
               </p14:xfrm>
             </p:contentPart>
           </mc:Choice>
-          <mc:Fallback>
+          <mc:Fallback xmlns="">
             <p:pic>
               <p:nvPicPr>
                 <p:cNvPr id="39" name="Ink 38">
@@ -12818,7 +12818,7 @@
         <p:spPr>
           <a:xfrm>
             <a:off x="349758" y="304860"/>
-            <a:ext cx="11116818" cy="3416320"/>
+            <a:ext cx="11116818" cy="4154984"/>
           </a:xfrm>
           <a:prstGeom prst="rect">
             <a:avLst/>
@@ -12986,161 +12986,8 @@
               </a:rPr>
               <a:t>20 components</a:t>
             </a:r>
-            <a:r>
-              <a:rPr lang="en-US" sz="2400" dirty="0">
-                <a:solidFill>
-                  <a:schemeClr val="accent6">
-                    <a:lumMod val="60000"/>
-                    <a:lumOff val="40000"/>
-                  </a:schemeClr>
-                </a:solidFill>
-              </a:rPr>
-              <a:t> with the coating and finds that the sample mean lifetime is </a:t>
-            </a:r>
-            <a:r>
-              <a:rPr lang="en-US" sz="2400" b="1" dirty="0">
-                <a:solidFill>
-                  <a:schemeClr val="accent6">
-                    <a:lumMod val="60000"/>
-                    <a:lumOff val="40000"/>
-                  </a:schemeClr>
-                </a:solidFill>
-              </a:rPr>
-              <a:t>107 months</a:t>
-            </a:r>
-            <a:r>
-              <a:rPr lang="en-US" sz="2400" dirty="0">
-                <a:solidFill>
-                  <a:schemeClr val="accent6">
-                    <a:lumMod val="60000"/>
-                    <a:lumOff val="40000"/>
-                  </a:schemeClr>
-                </a:solidFill>
-              </a:rPr>
-              <a:t> with a </a:t>
-            </a:r>
-            <a:r>
-              <a:rPr lang="en-US" sz="2400" b="1" dirty="0">
-                <a:solidFill>
-                  <a:schemeClr val="accent6">
-                    <a:lumMod val="60000"/>
-                    <a:lumOff val="40000"/>
-                  </a:schemeClr>
-                </a:solidFill>
-              </a:rPr>
-              <a:t>sample standard deviation of 8 months</a:t>
-            </a:r>
-            <a:r>
-              <a:rPr lang="en-US" sz="2400" dirty="0">
-                <a:solidFill>
-                  <a:schemeClr val="accent6">
-                    <a:lumMod val="60000"/>
-                    <a:lumOff val="40000"/>
-                  </a:schemeClr>
-                </a:solidFill>
-              </a:rPr>
-              <a:t>.</a:t>
-            </a:r>
-            <a:br>
-              <a:rPr lang="en-US" sz="2400" dirty="0">
-                <a:solidFill>
-                  <a:schemeClr val="accent6">
-                    <a:lumMod val="60000"/>
-                    <a:lumOff val="40000"/>
-                  </a:schemeClr>
-                </a:solidFill>
-              </a:rPr>
-            </a:br>
-            <a:r>
-              <a:rPr lang="en-US" sz="2400" dirty="0">
-                <a:solidFill>
-                  <a:schemeClr val="accent6">
-                    <a:lumMod val="60000"/>
-                    <a:lumOff val="40000"/>
-                  </a:schemeClr>
-                </a:solidFill>
-              </a:rPr>
-              <a:t>Test the engineer’s claim at α=0.05.</a:t>
-            </a:r>
-          </a:p>
-        </p:txBody>
-      </p:sp>
-      <p:sp>
-        <p:nvSpPr>
-          <p:cNvPr id="3" name="TextBox 2">
-            <a:extLst>
-              <a:ext uri="{FF2B5EF4-FFF2-40B4-BE49-F238E27FC236}">
-                <a16:creationId xmlns:a16="http://schemas.microsoft.com/office/drawing/2014/main" id="{B14FBDA3-4B07-9277-8041-13088E4950EF}"/>
-              </a:ext>
-            </a:extLst>
-          </p:cNvPr>
-          <p:cNvSpPr txBox="1"/>
-          <p:nvPr/>
-        </p:nvSpPr>
-        <p:spPr>
-          <a:xfrm>
-            <a:off x="596646" y="4237012"/>
-            <a:ext cx="11363706" cy="1200329"/>
-          </a:xfrm>
-          <a:prstGeom prst="rect">
-            <a:avLst/>
-          </a:prstGeom>
-          <a:noFill/>
-        </p:spPr>
-        <p:txBody>
-          <a:bodyPr wrap="square">
-            <a:spAutoFit/>
-          </a:bodyPr>
-          <a:lstStyle/>
-          <a:p>
-            <a:r>
-              <a:rPr lang="en-US" sz="2400" b="0" i="0" dirty="0">
-                <a:solidFill>
-                  <a:schemeClr val="accent6">
-                    <a:lumMod val="60000"/>
-                    <a:lumOff val="40000"/>
-                  </a:schemeClr>
-                </a:solidFill>
-                <a:effectLst/>
-              </a:rPr>
-              <a:t>Following are sample values</a:t>
-            </a:r>
-            <a:r>
-              <a:rPr lang="en-US" sz="2400" dirty="0">
-                <a:solidFill>
-                  <a:schemeClr val="accent6">
-                    <a:lumMod val="60000"/>
-                    <a:lumOff val="40000"/>
-                  </a:schemeClr>
-                </a:solidFill>
-              </a:rPr>
-              <a:t> with mean 107 and standard deviation 8:</a:t>
-            </a:r>
-          </a:p>
-          <a:p>
-            <a:endParaRPr lang="en-US" sz="2400" b="0" i="0" dirty="0">
-              <a:solidFill>
-                <a:schemeClr val="accent6">
-                  <a:lumMod val="60000"/>
-                  <a:lumOff val="40000"/>
-                </a:schemeClr>
-              </a:solidFill>
-              <a:effectLst/>
-            </a:endParaRPr>
-          </a:p>
-          <a:p>
-            <a:r>
-              <a:rPr lang="en-US" sz="2400" b="0" i="0" dirty="0">
-                <a:solidFill>
-                  <a:schemeClr val="accent6">
-                    <a:lumMod val="60000"/>
-                    <a:lumOff val="40000"/>
-                  </a:schemeClr>
-                </a:solidFill>
-                <a:effectLst/>
-              </a:rPr>
-              <a:t>[112 107 113 121 106 106 121 114 104 112 104 104 110 92 94 103 100 111 100 96] </a:t>
-            </a:r>
+          </a:p>
+          <a:p>
             <a:endParaRPr lang="en-US" sz="2400" dirty="0">
               <a:solidFill>
                 <a:schemeClr val="accent6">
@@ -13149,6 +12996,58 @@
                 </a:schemeClr>
               </a:solidFill>
             </a:endParaRPr>
+          </a:p>
+          <a:p>
+            <a:r>
+              <a:rPr lang="en-US" sz="2400" dirty="0">
+                <a:solidFill>
+                  <a:schemeClr val="accent6">
+                    <a:lumMod val="60000"/>
+                    <a:lumOff val="40000"/>
+                  </a:schemeClr>
+                </a:solidFill>
+              </a:rPr>
+              <a:t>[112 107 113 121 106 106 121 114 104 112 104 104 110 92 94 103 100 111 100 96] </a:t>
+            </a:r>
+          </a:p>
+          <a:p>
+            <a:r>
+              <a:rPr lang="en-US" sz="2400" dirty="0">
+                <a:solidFill>
+                  <a:schemeClr val="accent6">
+                    <a:lumMod val="60000"/>
+                    <a:lumOff val="40000"/>
+                  </a:schemeClr>
+                </a:solidFill>
+              </a:rPr>
+              <a:t>The mean of above is 107 and standard deviation 8:</a:t>
+            </a:r>
+          </a:p>
+          <a:p>
+            <a:pPr>
+              <a:buNone/>
+            </a:pPr>
+            <a:br>
+              <a:rPr lang="en-US" sz="2400" dirty="0">
+                <a:solidFill>
+                  <a:schemeClr val="accent6">
+                    <a:lumMod val="60000"/>
+                    <a:lumOff val="40000"/>
+                  </a:schemeClr>
+                </a:solidFill>
+              </a:rPr>
+            </a:br>
+            <a:r>
+              <a:rPr lang="en-US" sz="2400" dirty="0">
+                <a:solidFill>
+                  <a:schemeClr val="accent6">
+                    <a:lumMod val="60000"/>
+                    <a:lumOff val="40000"/>
+                  </a:schemeClr>
+                </a:solidFill>
+              </a:rPr>
+              <a:t>Test the engineer’s claim at α=0.05.</a:t>
+            </a:r>
           </a:p>
         </p:txBody>
       </p:sp>
